--- a/entregables/presentaciones/IQS_B5_Modelado_Control.pptx
+++ b/entregables/presentaciones/IQS_B5_Modelado_Control.pptx
@@ -7920,7 +7920,7 @@
                 <a:ea typeface="Calibri" pitchFamily="34" charset="-122"/>
                 <a:cs typeface="Calibri" pitchFamily="34" charset="-120"/>
               </a:rPr>
-              <a:t>Con linealización ideal, la dinámica del error es ë + Kv·ė + Kp·e = 0: lineal, desacoplada e independiente de la configuración (Corke, ec. 9.17). Es «control por dinámica inversa: un sistema no lineal en cascada con su inverso, de ganancia unidad» (Corke, p. 359).</a:t>
+              <a:t>Con linealización ideal, la dinámica del error es ë + Kv·ė + Kp·e = 0: lineal, desacoplada e independiente de la configuración (Corke, ec. 9.17). Es «control por dinámica inversa: un sistema no lineal en cascada con su inverso, de ganancia unidad» (Corke, pp. 359-360).</a:t>
             </a:r>
             <a:endParaRPr lang="en-US" sz="1150" dirty="0"/>
           </a:p>
@@ -10864,7 +10864,7 @@
                 <a:ea typeface="Calibri" pitchFamily="34" charset="-122"/>
                 <a:cs typeface="Calibri" pitchFamily="34" charset="-120"/>
               </a:rPr>
-              <a:t>Reducción a primer orden: la constante de tiempo eléctrica « la mecánica (Lynch y Park, p. 310):</a:t>
+              <a:t>Reducción a primer orden: la constante de tiempo eléctrica « la mecánica (De Silva et al., p. 91):</a:t>
             </a:r>
             <a:endParaRPr lang="en-US" sz="1250" dirty="0"/>
           </a:p>
@@ -11327,7 +11327,7 @@
                 <a:ea typeface="Calibri" pitchFamily="34" charset="-122"/>
                 <a:cs typeface="Calibri" pitchFamily="34" charset="-120"/>
               </a:rPr>
-              <a:t>De Silva et al., 2016, pp. 88-91 · Lynch y Park, 2017, pp. 306-311 · Corke, 2023, pp. 346-348</a:t>
+              <a:t>De Silva et al., 2016, pp. 88-91 · Lynch y Park, 2017, pp. 306-311 · Corke, 2023, pp. 334-341</a:t>
             </a:r>
             <a:endParaRPr lang="en-US" sz="1000" dirty="0"/>
           </a:p>

--- a/entregables/presentaciones/IQS_B5_Modelado_Control.pptx
+++ b/entregables/presentaciones/IQS_B5_Modelado_Control.pptx
@@ -8128,7 +8128,7 @@
                 <a:ea typeface="Calibri" pitchFamily="34" charset="-122"/>
                 <a:cs typeface="Calibri" pitchFamily="34" charset="-120"/>
               </a:rPr>
-              <a:t>Exige estimar masas, centros de masas, inercias y fricción; con error de modelo aparece un forzamiento en la dinámica del error. En la práctica: mejor seguimiento que feedforward o feedback solos, con menos esfuerzo de control.</a:t>
+              <a:t>Exige estimar masas, centros de masas, inercias y fricción; con error de modelo aparece un forzamiento en la dinámica del error. En la práctica: mejor seguimiento que la prealimentación o la realimentación solas, con menos esfuerzo de control.</a:t>
             </a:r>
             <a:endParaRPr lang="en-US" sz="1150" dirty="0"/>
           </a:p>

--- a/entregables/presentaciones/IQS_B5_Modelado_Control.pptx
+++ b/entregables/presentaciones/IQS_B5_Modelado_Control.pptx
@@ -2947,6 +2947,43 @@
           </a:p>
         </p:txBody>
       </p:sp>
+      <p:sp>
+        <p:nvSpPr>
+          <p:cNvPr id="8" name="TextBox 7">
+            <a:hlinkClick r:id="rId3"/>
+          </p:cNvPr>
+          <p:cNvSpPr txBox="1"/>
+          <p:nvPr/>
+        </p:nvSpPr>
+        <p:spPr>
+          <a:xfrm>
+            <a:off x="2057400" y="3310128"/>
+            <a:ext cx="5486400" cy="347472"/>
+          </a:xfrm>
+          <a:prstGeom prst="rect">
+            <a:avLst/>
+          </a:prstGeom>
+          <a:noFill/>
+        </p:spPr>
+        <p:txBody>
+          <a:bodyPr wrap="square" lIns="0" tIns="0" bIns="0" rIns="0">
+            <a:noAutofit/>
+          </a:bodyPr>
+          <a:lstStyle/>
+          <a:p>
+            <a:pPr algn="l"/>
+            <a:r>
+              <a:rPr sz="1400" b="1">
+                <a:solidFill>
+                  <a:srgbClr val="2FD26E"/>
+                </a:solidFill>
+                <a:latin typeface="Calibri"/>
+              </a:rPr>
+              <a:t>▸  Abrir en Colab · cuaderno S22</a:t>
+            </a:r>
+          </a:p>
+        </p:txBody>
+      </p:sp>
     </p:spTree>
   </p:cSld>
   <p:clrMapOvr>
@@ -5364,6 +5401,43 @@
           </a:p>
         </p:txBody>
       </p:sp>
+      <p:sp>
+        <p:nvSpPr>
+          <p:cNvPr id="8" name="TextBox 7">
+            <a:hlinkClick r:id="rId3"/>
+          </p:cNvPr>
+          <p:cNvSpPr txBox="1"/>
+          <p:nvPr/>
+        </p:nvSpPr>
+        <p:spPr>
+          <a:xfrm>
+            <a:off x="2057400" y="3310128"/>
+            <a:ext cx="5486400" cy="347472"/>
+          </a:xfrm>
+          <a:prstGeom prst="rect">
+            <a:avLst/>
+          </a:prstGeom>
+          <a:noFill/>
+        </p:spPr>
+        <p:txBody>
+          <a:bodyPr wrap="square" lIns="0" tIns="0" bIns="0" rIns="0">
+            <a:noAutofit/>
+          </a:bodyPr>
+          <a:lstStyle/>
+          <a:p>
+            <a:pPr algn="l"/>
+            <a:r>
+              <a:rPr sz="1400" b="1">
+                <a:solidFill>
+                  <a:srgbClr val="2FD26E"/>
+                </a:solidFill>
+                <a:latin typeface="Calibri"/>
+              </a:rPr>
+              <a:t>▸  Abrir en Colab · cuaderno S23</a:t>
+            </a:r>
+          </a:p>
+        </p:txBody>
+      </p:sp>
     </p:spTree>
   </p:cSld>
   <p:clrMapOvr>
@@ -6102,6 +6176,43 @@
           </a:p>
         </p:txBody>
       </p:sp>
+      <p:sp>
+        <p:nvSpPr>
+          <p:cNvPr id="8" name="TextBox 7">
+            <a:hlinkClick r:id="rId3"/>
+          </p:cNvPr>
+          <p:cNvSpPr txBox="1"/>
+          <p:nvPr/>
+        </p:nvSpPr>
+        <p:spPr>
+          <a:xfrm>
+            <a:off x="2057400" y="3310128"/>
+            <a:ext cx="5486400" cy="347472"/>
+          </a:xfrm>
+          <a:prstGeom prst="rect">
+            <a:avLst/>
+          </a:prstGeom>
+          <a:noFill/>
+        </p:spPr>
+        <p:txBody>
+          <a:bodyPr wrap="square" lIns="0" tIns="0" bIns="0" rIns="0">
+            <a:noAutofit/>
+          </a:bodyPr>
+          <a:lstStyle/>
+          <a:p>
+            <a:pPr algn="l"/>
+            <a:r>
+              <a:rPr sz="1400" b="1">
+                <a:solidFill>
+                  <a:srgbClr val="2FD26E"/>
+                </a:solidFill>
+                <a:latin typeface="Calibri"/>
+              </a:rPr>
+              <a:t>▸  Abrir en Colab · cuaderno S24</a:t>
+            </a:r>
+          </a:p>
+        </p:txBody>
+      </p:sp>
     </p:spTree>
   </p:cSld>
   <p:clrMapOvr>
@@ -10370,6 +10481,43 @@
           </a:p>
         </p:txBody>
       </p:sp>
+      <p:sp>
+        <p:nvSpPr>
+          <p:cNvPr id="12" name="TextBox 11">
+            <a:hlinkClick r:id="rId4"/>
+          </p:cNvPr>
+          <p:cNvSpPr txBox="1"/>
+          <p:nvPr/>
+        </p:nvSpPr>
+        <p:spPr>
+          <a:xfrm>
+            <a:off x="2057400" y="3310128"/>
+            <a:ext cx="5486400" cy="347472"/>
+          </a:xfrm>
+          <a:prstGeom prst="rect">
+            <a:avLst/>
+          </a:prstGeom>
+          <a:noFill/>
+        </p:spPr>
+        <p:txBody>
+          <a:bodyPr wrap="square" lIns="0" tIns="0" bIns="0" rIns="0">
+            <a:noAutofit/>
+          </a:bodyPr>
+          <a:lstStyle/>
+          <a:p>
+            <a:pPr algn="l"/>
+            <a:r>
+              <a:rPr sz="1400" b="1">
+                <a:solidFill>
+                  <a:srgbClr val="2FD26E"/>
+                </a:solidFill>
+                <a:latin typeface="Calibri"/>
+              </a:rPr>
+              <a:t>▸  Abrir en Colab · cuaderno S20</a:t>
+            </a:r>
+          </a:p>
+        </p:txBody>
+      </p:sp>
     </p:spTree>
   </p:cSld>
   <p:clrMapOvr>
@@ -12226,6 +12374,43 @@
               <a:t>Primer y segundo orden · polos y estabilidad · python-control</a:t>
             </a:r>
             <a:endParaRPr lang="en-US" sz="1600" dirty="0"/>
+          </a:p>
+        </p:txBody>
+      </p:sp>
+      <p:sp>
+        <p:nvSpPr>
+          <p:cNvPr id="8" name="TextBox 7">
+            <a:hlinkClick r:id="rId3"/>
+          </p:cNvPr>
+          <p:cNvSpPr txBox="1"/>
+          <p:nvPr/>
+        </p:nvSpPr>
+        <p:spPr>
+          <a:xfrm>
+            <a:off x="2057400" y="3310128"/>
+            <a:ext cx="5486400" cy="347472"/>
+          </a:xfrm>
+          <a:prstGeom prst="rect">
+            <a:avLst/>
+          </a:prstGeom>
+          <a:noFill/>
+        </p:spPr>
+        <p:txBody>
+          <a:bodyPr wrap="square" lIns="0" tIns="0" bIns="0" rIns="0">
+            <a:noAutofit/>
+          </a:bodyPr>
+          <a:lstStyle/>
+          <a:p>
+            <a:pPr algn="l"/>
+            <a:r>
+              <a:rPr sz="1400" b="1">
+                <a:solidFill>
+                  <a:srgbClr val="2FD26E"/>
+                </a:solidFill>
+                <a:latin typeface="Calibri"/>
+              </a:rPr>
+              <a:t>▸  Abrir en Colab · cuaderno S21</a:t>
+            </a:r>
           </a:p>
         </p:txBody>
       </p:sp>
